--- a/assets/pptx/catalog-120.pptx
+++ b/assets/pptx/catalog-120.pptx
@@ -3323,7 +3323,7 @@
                 <a:ea typeface="Ebrima"/>
                 <a:cs typeface="Ebrima"/>
               </a:rPr>
-              <a:t>ዛሬም ገናና ኦሆ ዛሬም ገናና አሃ (2x)</a:t>
+              <a:t>ዛሬም ገናና ኦሆ ዛሬም ገናና አሃ 2x</a:t>
             </a:r>
           </a:p>
         </p:txBody>
@@ -3444,7 +3444,7 @@
                 <a:ea typeface="Ebrima"/>
                 <a:cs typeface="Ebrima"/>
               </a:rPr>
-              <a:t>እርሱ ብቻ ገናና (2x)</a:t>
+              <a:t>እርሱ ብቻ ገናና 2x</a:t>
             </a:r>
           </a:p>
         </p:txBody>
@@ -3565,7 +3565,7 @@
                 <a:ea typeface="Ebrima"/>
                 <a:cs typeface="Ebrima"/>
               </a:rPr>
-              <a:t>እርሱ ብቻ ገናና (2x)</a:t>
+              <a:t>እርሱ ብቻ ገናና 2x</a:t>
             </a:r>
           </a:p>
         </p:txBody>
@@ -3856,7 +3856,7 @@
                 <a:ea typeface="Ebrima"/>
                 <a:cs typeface="Ebrima"/>
               </a:rPr>
-              <a:t>አንተ ብቻ ነህ ጸንተህ ምትኖር (2x)</a:t>
+              <a:t>አንተ ብቻ ነህ ጸንተህ ምትኖር 2x</a:t>
             </a:r>
           </a:p>
         </p:txBody>
@@ -3995,7 +3995,7 @@
                 <a:ea typeface="Ebrima"/>
                 <a:cs typeface="Ebrima"/>
               </a:rPr>
-              <a:t>በዙፋንህ አሃ/ኦሆ (2x)</a:t>
+              <a:t>በዙፋንህ አሃ/ኦሆ 2x</a:t>
             </a:r>
           </a:p>
         </p:txBody>
@@ -4286,7 +4286,7 @@
                 <a:ea typeface="Ebrima"/>
                 <a:cs typeface="Ebrima"/>
               </a:rPr>
-              <a:t>አንተ ብቻ ነህ ጸንተህ ምትኖር (2x)</a:t>
+              <a:t>አንተ ብቻ ነህ ጸንተህ ምትኖር 2x</a:t>
             </a:r>
           </a:p>
         </p:txBody>
@@ -4389,7 +4389,7 @@
                 <a:ea typeface="Ebrima"/>
                 <a:cs typeface="Ebrima"/>
               </a:rPr>
-              <a:t>ክብር ለአንተ (ኦሆሆሆ) ሞገስ ለአንተ (አሃሃሃ) ሞገስ ለአንተ ነው</a:t>
+              <a:t>ክብር ለአንተ ኦሆሆሆ ሞገስ ለአንተ አሃሃሃ ሞገስ ለአንተ ነው</a:t>
             </a:r>
           </a:p>
           <a:p>
@@ -4407,7 +4407,7 @@
                 <a:ea typeface="Ebrima"/>
                 <a:cs typeface="Ebrima"/>
               </a:rPr>
-              <a:t>ምሥጋና ለአንተ (ኦሆሆሆ) ክብር ለአንተ (አሃሃሃ) ክብር ለአንተ ነው</a:t>
+              <a:t>ምሥጋና ለአንተ ኦሆሆሆ ክብር ለአንተ አሃሃሃ ክብር ለአንተ ነው</a:t>
             </a:r>
           </a:p>
         </p:txBody>
